--- a/algo_overview.pptx
+++ b/algo_overview.pptx
@@ -243,7 +243,7 @@
           <a:p>
             <a:fld id="{427967E6-AEBA-6243-883F-AFDAD1E47229}" type="datetimeFigureOut">
               <a:rPr lang="en-US" smtClean="0"/>
-              <a:t>11/19/25</a:t>
+              <a:t>3/21/26</a:t>
             </a:fld>
             <a:endParaRPr lang="en-US"/>
           </a:p>
@@ -413,7 +413,7 @@
           <a:p>
             <a:fld id="{427967E6-AEBA-6243-883F-AFDAD1E47229}" type="datetimeFigureOut">
               <a:rPr lang="en-US" smtClean="0"/>
-              <a:t>11/19/25</a:t>
+              <a:t>3/21/26</a:t>
             </a:fld>
             <a:endParaRPr lang="en-US"/>
           </a:p>
@@ -593,7 +593,7 @@
           <a:p>
             <a:fld id="{427967E6-AEBA-6243-883F-AFDAD1E47229}" type="datetimeFigureOut">
               <a:rPr lang="en-US" smtClean="0"/>
-              <a:t>11/19/25</a:t>
+              <a:t>3/21/26</a:t>
             </a:fld>
             <a:endParaRPr lang="en-US"/>
           </a:p>
@@ -763,7 +763,7 @@
           <a:p>
             <a:fld id="{427967E6-AEBA-6243-883F-AFDAD1E47229}" type="datetimeFigureOut">
               <a:rPr lang="en-US" smtClean="0"/>
-              <a:t>11/19/25</a:t>
+              <a:t>3/21/26</a:t>
             </a:fld>
             <a:endParaRPr lang="en-US"/>
           </a:p>
@@ -1009,7 +1009,7 @@
           <a:p>
             <a:fld id="{427967E6-AEBA-6243-883F-AFDAD1E47229}" type="datetimeFigureOut">
               <a:rPr lang="en-US" smtClean="0"/>
-              <a:t>11/19/25</a:t>
+              <a:t>3/21/26</a:t>
             </a:fld>
             <a:endParaRPr lang="en-US"/>
           </a:p>
@@ -1241,7 +1241,7 @@
           <a:p>
             <a:fld id="{427967E6-AEBA-6243-883F-AFDAD1E47229}" type="datetimeFigureOut">
               <a:rPr lang="en-US" smtClean="0"/>
-              <a:t>11/19/25</a:t>
+              <a:t>3/21/26</a:t>
             </a:fld>
             <a:endParaRPr lang="en-US"/>
           </a:p>
@@ -1608,7 +1608,7 @@
           <a:p>
             <a:fld id="{427967E6-AEBA-6243-883F-AFDAD1E47229}" type="datetimeFigureOut">
               <a:rPr lang="en-US" smtClean="0"/>
-              <a:t>11/19/25</a:t>
+              <a:t>3/21/26</a:t>
             </a:fld>
             <a:endParaRPr lang="en-US"/>
           </a:p>
@@ -1726,7 +1726,7 @@
           <a:p>
             <a:fld id="{427967E6-AEBA-6243-883F-AFDAD1E47229}" type="datetimeFigureOut">
               <a:rPr lang="en-US" smtClean="0"/>
-              <a:t>11/19/25</a:t>
+              <a:t>3/21/26</a:t>
             </a:fld>
             <a:endParaRPr lang="en-US"/>
           </a:p>
@@ -1821,7 +1821,7 @@
           <a:p>
             <a:fld id="{427967E6-AEBA-6243-883F-AFDAD1E47229}" type="datetimeFigureOut">
               <a:rPr lang="en-US" smtClean="0"/>
-              <a:t>11/19/25</a:t>
+              <a:t>3/21/26</a:t>
             </a:fld>
             <a:endParaRPr lang="en-US"/>
           </a:p>
@@ -2098,7 +2098,7 @@
           <a:p>
             <a:fld id="{427967E6-AEBA-6243-883F-AFDAD1E47229}" type="datetimeFigureOut">
               <a:rPr lang="en-US" smtClean="0"/>
-              <a:t>11/19/25</a:t>
+              <a:t>3/21/26</a:t>
             </a:fld>
             <a:endParaRPr lang="en-US"/>
           </a:p>
@@ -2355,7 +2355,7 @@
           <a:p>
             <a:fld id="{427967E6-AEBA-6243-883F-AFDAD1E47229}" type="datetimeFigureOut">
               <a:rPr lang="en-US" smtClean="0"/>
-              <a:t>11/19/25</a:t>
+              <a:t>3/21/26</a:t>
             </a:fld>
             <a:endParaRPr lang="en-US"/>
           </a:p>
@@ -2568,7 +2568,7 @@
           <a:p>
             <a:fld id="{427967E6-AEBA-6243-883F-AFDAD1E47229}" type="datetimeFigureOut">
               <a:rPr lang="en-US" smtClean="0"/>
-              <a:t>11/19/25</a:t>
+              <a:t>3/21/26</a:t>
             </a:fld>
             <a:endParaRPr lang="en-US"/>
           </a:p>
@@ -6337,8 +6337,8 @@
           </a:p>
         </p:txBody>
       </p:sp>
-      <mc:AlternateContent xmlns:mc="http://schemas.openxmlformats.org/markup-compatibility/2006">
-        <mc:Choice xmlns:a14="http://schemas.microsoft.com/office/drawing/2010/main" Requires="a14">
+      <mc:AlternateContent xmlns:mc="http://schemas.openxmlformats.org/markup-compatibility/2006" xmlns:a14="http://schemas.microsoft.com/office/drawing/2010/main">
+        <mc:Choice Requires="a14">
           <p:sp>
             <p:nvSpPr>
               <p:cNvPr id="67" name="TextBox 66">
@@ -6395,7 +6395,7 @@
             </p:txBody>
           </p:sp>
         </mc:Choice>
-        <mc:Fallback>
+        <mc:Fallback xmlns="">
           <p:sp>
             <p:nvSpPr>
               <p:cNvPr id="67" name="TextBox 66">
